--- a/SwordRush 발표자료.pptx
+++ b/SwordRush 발표자료.pptx
@@ -14,7 +14,7 @@
     <p:sldId id="262" r:id="rId8"/>
     <p:sldId id="263" r:id="rId9"/>
     <p:sldId id="264" r:id="rId10"/>
-    <p:sldId id="265" r:id="rId11"/>
+    <p:sldId id="275" r:id="rId11"/>
     <p:sldId id="266" r:id="rId12"/>
     <p:sldId id="267" r:id="rId13"/>
     <p:sldId id="268" r:id="rId14"/>
@@ -322,7 +322,7 @@
           <a:p>
             <a:fld id="{5BCAD085-E8A6-8845-BD4E-CB4CCA059FC4}" type="datetimeFigureOut">
               <a:rPr lang="en-US" smtClean="0"/>
-              <a:t>6/8/2026</a:t>
+              <a:t>6/9/2026</a:t>
             </a:fld>
             <a:endParaRPr lang="en-US"/>
           </a:p>
@@ -492,7 +492,7 @@
           <a:p>
             <a:fld id="{5BCAD085-E8A6-8845-BD4E-CB4CCA059FC4}" type="datetimeFigureOut">
               <a:rPr lang="en-US" smtClean="0"/>
-              <a:t>6/8/2026</a:t>
+              <a:t>6/9/2026</a:t>
             </a:fld>
             <a:endParaRPr lang="en-US"/>
           </a:p>
@@ -672,7 +672,7 @@
           <a:p>
             <a:fld id="{5BCAD085-E8A6-8845-BD4E-CB4CCA059FC4}" type="datetimeFigureOut">
               <a:rPr lang="en-US" smtClean="0"/>
-              <a:t>6/8/2026</a:t>
+              <a:t>6/9/2026</a:t>
             </a:fld>
             <a:endParaRPr lang="en-US"/>
           </a:p>
@@ -842,7 +842,7 @@
           <a:p>
             <a:fld id="{5BCAD085-E8A6-8845-BD4E-CB4CCA059FC4}" type="datetimeFigureOut">
               <a:rPr lang="en-US" smtClean="0"/>
-              <a:t>6/8/2026</a:t>
+              <a:t>6/9/2026</a:t>
             </a:fld>
             <a:endParaRPr lang="en-US"/>
           </a:p>
@@ -1088,7 +1088,7 @@
           <a:p>
             <a:fld id="{5BCAD085-E8A6-8845-BD4E-CB4CCA059FC4}" type="datetimeFigureOut">
               <a:rPr lang="en-US" smtClean="0"/>
-              <a:t>6/8/2026</a:t>
+              <a:t>6/9/2026</a:t>
             </a:fld>
             <a:endParaRPr lang="en-US"/>
           </a:p>
@@ -1376,7 +1376,7 @@
           <a:p>
             <a:fld id="{5BCAD085-E8A6-8845-BD4E-CB4CCA059FC4}" type="datetimeFigureOut">
               <a:rPr lang="en-US" smtClean="0"/>
-              <a:t>6/8/2026</a:t>
+              <a:t>6/9/2026</a:t>
             </a:fld>
             <a:endParaRPr lang="en-US"/>
           </a:p>
@@ -1798,7 +1798,7 @@
           <a:p>
             <a:fld id="{5BCAD085-E8A6-8845-BD4E-CB4CCA059FC4}" type="datetimeFigureOut">
               <a:rPr lang="en-US" smtClean="0"/>
-              <a:t>6/8/2026</a:t>
+              <a:t>6/9/2026</a:t>
             </a:fld>
             <a:endParaRPr lang="en-US"/>
           </a:p>
@@ -1916,7 +1916,7 @@
           <a:p>
             <a:fld id="{5BCAD085-E8A6-8845-BD4E-CB4CCA059FC4}" type="datetimeFigureOut">
               <a:rPr lang="en-US" smtClean="0"/>
-              <a:t>6/8/2026</a:t>
+              <a:t>6/9/2026</a:t>
             </a:fld>
             <a:endParaRPr lang="en-US"/>
           </a:p>
@@ -2011,7 +2011,7 @@
           <a:p>
             <a:fld id="{5BCAD085-E8A6-8845-BD4E-CB4CCA059FC4}" type="datetimeFigureOut">
               <a:rPr lang="en-US" smtClean="0"/>
-              <a:t>6/8/2026</a:t>
+              <a:t>6/9/2026</a:t>
             </a:fld>
             <a:endParaRPr lang="en-US"/>
           </a:p>
@@ -2288,7 +2288,7 @@
           <a:p>
             <a:fld id="{5BCAD085-E8A6-8845-BD4E-CB4CCA059FC4}" type="datetimeFigureOut">
               <a:rPr lang="en-US" smtClean="0"/>
-              <a:t>6/8/2026</a:t>
+              <a:t>6/9/2026</a:t>
             </a:fld>
             <a:endParaRPr lang="en-US"/>
           </a:p>
@@ -2541,7 +2541,7 @@
           <a:p>
             <a:fld id="{5BCAD085-E8A6-8845-BD4E-CB4CCA059FC4}" type="datetimeFigureOut">
               <a:rPr lang="en-US" smtClean="0"/>
-              <a:t>6/8/2026</a:t>
+              <a:t>6/9/2026</a:t>
             </a:fld>
             <a:endParaRPr lang="en-US"/>
           </a:p>
@@ -2754,7 +2754,7 @@
           <a:p>
             <a:fld id="{5BCAD085-E8A6-8845-BD4E-CB4CCA059FC4}" type="datetimeFigureOut">
               <a:rPr lang="en-US" smtClean="0"/>
-              <a:t>6/8/2026</a:t>
+              <a:t>6/9/2026</a:t>
             </a:fld>
             <a:endParaRPr lang="en-US"/>
           </a:p>
@@ -3499,6 +3499,30 @@
           <a:chExt cx="0" cy="0"/>
         </a:xfrm>
       </p:grpSpPr>
+      <p:pic>
+        <p:nvPicPr>
+          <p:cNvPr id="29" name="그림 28"/>
+          <p:cNvPicPr>
+            <a:picLocks noChangeAspect="1"/>
+          </p:cNvPicPr>
+          <p:nvPr/>
+        </p:nvPicPr>
+        <p:blipFill>
+          <a:blip r:embed="rId2"/>
+          <a:stretch>
+            <a:fillRect/>
+          </a:stretch>
+        </p:blipFill>
+        <p:spPr>
+          <a:xfrm>
+            <a:off x="5014383" y="1721056"/>
+            <a:ext cx="3577504" cy="2044288"/>
+          </a:xfrm>
+          <a:prstGeom prst="rect">
+            <a:avLst/>
+          </a:prstGeom>
+        </p:spPr>
+      </p:pic>
       <p:sp>
         <p:nvSpPr>
           <p:cNvPr id="2" name="TextBox 1"/>
@@ -3628,107 +3652,431 @@
           <a:p>
             <a:pPr algn="l"/>
             <a:r>
-              <a:rPr sz="1100" b="0" i="0">
+              <a:rPr sz="1100" b="0" i="0" dirty="0">
                 <a:solidFill>
                   <a:srgbClr val="333333"/>
                 </a:solidFill>
                 <a:latin typeface="맑은 고딕"/>
               </a:rPr>
-              <a:t>· 자식 GameObject 순서 = 경로 순서</a:t>
-            </a:r>
-          </a:p>
-          <a:p>
-            <a:pPr algn="l"/>
-            <a:r>
-              <a:rPr sz="1100" b="0" i="0">
+              <a:t>· </a:t>
+            </a:r>
+            <a:r>
+              <a:rPr sz="1100" b="0" i="0" dirty="0" err="1">
                 <a:solidFill>
                   <a:srgbClr val="333333"/>
                 </a:solidFill>
                 <a:latin typeface="맑은 고딕"/>
               </a:rPr>
-              <a:t>· 에디터에서 자식 Transform 만 드래그하면 그대로 경로</a:t>
-            </a:r>
-          </a:p>
-          <a:p>
-            <a:pPr algn="l"/>
-            <a:r>
-              <a:rPr sz="1100" b="0" i="0">
+              <a:t>자식</a:t>
+            </a:r>
+            <a:r>
+              <a:rPr sz="1100" b="0" i="0" dirty="0">
                 <a:solidFill>
                   <a:srgbClr val="333333"/>
                 </a:solidFill>
                 <a:latin typeface="맑은 고딕"/>
               </a:rPr>
+              <a:t> </a:t>
+            </a:r>
+            <a:r>
+              <a:rPr sz="1100" b="0" i="0" dirty="0" err="1">
+                <a:solidFill>
+                  <a:srgbClr val="333333"/>
+                </a:solidFill>
+                <a:latin typeface="맑은 고딕"/>
+              </a:rPr>
+              <a:t>GameObject</a:t>
+            </a:r>
+            <a:r>
+              <a:rPr sz="1100" b="0" i="0" dirty="0">
+                <a:solidFill>
+                  <a:srgbClr val="333333"/>
+                </a:solidFill>
+                <a:latin typeface="맑은 고딕"/>
+              </a:rPr>
+              <a:t> </a:t>
+            </a:r>
+            <a:r>
+              <a:rPr sz="1100" b="0" i="0" dirty="0" err="1">
+                <a:solidFill>
+                  <a:srgbClr val="333333"/>
+                </a:solidFill>
+                <a:latin typeface="맑은 고딕"/>
+              </a:rPr>
+              <a:t>순서</a:t>
+            </a:r>
+            <a:r>
+              <a:rPr sz="1100" b="0" i="0" dirty="0">
+                <a:solidFill>
+                  <a:srgbClr val="333333"/>
+                </a:solidFill>
+                <a:latin typeface="맑은 고딕"/>
+              </a:rPr>
+              <a:t> = </a:t>
+            </a:r>
+            <a:r>
+              <a:rPr sz="1100" b="0" i="0" dirty="0" err="1">
+                <a:solidFill>
+                  <a:srgbClr val="333333"/>
+                </a:solidFill>
+                <a:latin typeface="맑은 고딕"/>
+              </a:rPr>
+              <a:t>경로</a:t>
+            </a:r>
+            <a:r>
+              <a:rPr sz="1100" b="0" i="0" dirty="0">
+                <a:solidFill>
+                  <a:srgbClr val="333333"/>
+                </a:solidFill>
+                <a:latin typeface="맑은 고딕"/>
+              </a:rPr>
+              <a:t> </a:t>
+            </a:r>
+            <a:r>
+              <a:rPr sz="1100" b="0" i="0" dirty="0" err="1">
+                <a:solidFill>
+                  <a:srgbClr val="333333"/>
+                </a:solidFill>
+                <a:latin typeface="맑은 고딕"/>
+              </a:rPr>
+              <a:t>순서</a:t>
+            </a:r>
+            <a:endParaRPr sz="1100" b="0" i="0" dirty="0">
+              <a:solidFill>
+                <a:srgbClr val="333333"/>
+              </a:solidFill>
+              <a:latin typeface="맑은 고딕"/>
+            </a:endParaRPr>
+          </a:p>
+          <a:p>
+            <a:pPr algn="l"/>
+            <a:r>
+              <a:rPr sz="1100" b="0" i="0" dirty="0">
+                <a:solidFill>
+                  <a:srgbClr val="333333"/>
+                </a:solidFill>
+                <a:latin typeface="맑은 고딕"/>
+              </a:rPr>
+              <a:t>· </a:t>
+            </a:r>
+            <a:r>
+              <a:rPr sz="1100" b="0" i="0" dirty="0" err="1">
+                <a:solidFill>
+                  <a:srgbClr val="333333"/>
+                </a:solidFill>
+                <a:latin typeface="맑은 고딕"/>
+              </a:rPr>
+              <a:t>에디터에서</a:t>
+            </a:r>
+            <a:r>
+              <a:rPr sz="1100" b="0" i="0" dirty="0">
+                <a:solidFill>
+                  <a:srgbClr val="333333"/>
+                </a:solidFill>
+                <a:latin typeface="맑은 고딕"/>
+              </a:rPr>
+              <a:t> </a:t>
+            </a:r>
+            <a:r>
+              <a:rPr sz="1100" b="0" i="0" dirty="0" err="1">
+                <a:solidFill>
+                  <a:srgbClr val="333333"/>
+                </a:solidFill>
+                <a:latin typeface="맑은 고딕"/>
+              </a:rPr>
+              <a:t>자식</a:t>
+            </a:r>
+            <a:r>
+              <a:rPr sz="1100" b="0" i="0" dirty="0">
+                <a:solidFill>
+                  <a:srgbClr val="333333"/>
+                </a:solidFill>
+                <a:latin typeface="맑은 고딕"/>
+              </a:rPr>
+              <a:t> Transform 만 </a:t>
+            </a:r>
+            <a:r>
+              <a:rPr sz="1100" b="0" i="0" dirty="0" err="1">
+                <a:solidFill>
+                  <a:srgbClr val="333333"/>
+                </a:solidFill>
+                <a:latin typeface="맑은 고딕"/>
+              </a:rPr>
+              <a:t>드래그하면</a:t>
+            </a:r>
+            <a:r>
+              <a:rPr sz="1100" b="0" i="0" dirty="0">
+                <a:solidFill>
+                  <a:srgbClr val="333333"/>
+                </a:solidFill>
+                <a:latin typeface="맑은 고딕"/>
+              </a:rPr>
+              <a:t> </a:t>
+            </a:r>
+            <a:r>
+              <a:rPr sz="1100" b="0" i="0" dirty="0" err="1">
+                <a:solidFill>
+                  <a:srgbClr val="333333"/>
+                </a:solidFill>
+                <a:latin typeface="맑은 고딕"/>
+              </a:rPr>
+              <a:t>그대로</a:t>
+            </a:r>
+            <a:r>
+              <a:rPr sz="1100" b="0" i="0" dirty="0">
+                <a:solidFill>
+                  <a:srgbClr val="333333"/>
+                </a:solidFill>
+                <a:latin typeface="맑은 고딕"/>
+              </a:rPr>
+              <a:t> </a:t>
+            </a:r>
+            <a:r>
+              <a:rPr sz="1100" b="0" i="0" dirty="0" err="1">
+                <a:solidFill>
+                  <a:srgbClr val="333333"/>
+                </a:solidFill>
+                <a:latin typeface="맑은 고딕"/>
+              </a:rPr>
+              <a:t>경로</a:t>
+            </a:r>
+            <a:endParaRPr sz="1100" b="0" i="0" dirty="0">
+              <a:solidFill>
+                <a:srgbClr val="333333"/>
+              </a:solidFill>
+              <a:latin typeface="맑은 고딕"/>
+            </a:endParaRPr>
+          </a:p>
+          <a:p>
+            <a:pPr algn="l"/>
+            <a:r>
+              <a:rPr sz="1100" b="0" i="0" dirty="0">
+                <a:solidFill>
+                  <a:srgbClr val="333333"/>
+                </a:solidFill>
+                <a:latin typeface="맑은 고딕"/>
+              </a:rPr>
               <a:t>· Spawn = Waypoints[0], End = Waypoints[Count-1]</a:t>
             </a:r>
           </a:p>
           <a:p>
             <a:pPr algn="l"/>
             <a:r>
-              <a:rPr sz="1100" b="0" i="0">
+              <a:rPr sz="1100" b="0" i="0" dirty="0">
                 <a:solidFill>
                   <a:srgbClr val="333333"/>
                 </a:solidFill>
                 <a:latin typeface="맑은 고딕"/>
               </a:rPr>
-              <a:t>· OnDrawGizmos 로 씬뷰에 점 + 선 표시 (디자이너 친화)</a:t>
-            </a:r>
-          </a:p>
-          <a:p>
-            <a:pPr algn="l"/>
-            <a:r>
-              <a:rPr sz="1100" b="0" i="0">
+              <a:t>· </a:t>
+            </a:r>
+            <a:r>
+              <a:rPr sz="1100" b="0" i="0" dirty="0" err="1">
                 <a:solidFill>
                   <a:srgbClr val="333333"/>
                 </a:solidFill>
                 <a:latin typeface="맑은 고딕"/>
               </a:rPr>
-              <a:t>· EnemyPath 여러 개 = 즉시 다중 경로 지원</a:t>
-            </a:r>
-          </a:p>
-        </p:txBody>
-      </p:sp>
-      <p:sp>
-        <p:nvSpPr>
-          <p:cNvPr id="6" name="Rectangle 5"/>
-          <p:cNvSpPr/>
-          <p:nvPr/>
-        </p:nvSpPr>
-        <p:spPr>
-          <a:xfrm>
-            <a:off x="5760720" y="1325880"/>
-            <a:ext cx="2926080" cy="3246120"/>
-          </a:xfrm>
-          <a:prstGeom prst="rect">
-            <a:avLst/>
-          </a:prstGeom>
-          <a:solidFill>
-            <a:srgbClr val="EEF3FB"/>
-          </a:solidFill>
-          <a:ln>
-            <a:noFill/>
-          </a:ln>
-          <a:effectLst/>
-        </p:spPr>
-        <p:style>
-          <a:lnRef idx="1">
-            <a:schemeClr val="accent1"/>
-          </a:lnRef>
-          <a:fillRef idx="3">
-            <a:schemeClr val="accent1"/>
-          </a:fillRef>
-          <a:effectRef idx="2">
-            <a:schemeClr val="accent1"/>
-          </a:effectRef>
-          <a:fontRef idx="minor">
-            <a:schemeClr val="lt1"/>
-          </a:fontRef>
-        </p:style>
-        <p:txBody>
-          <a:bodyPr rtlCol="0" anchor="ctr"/>
-          <a:lstStyle/>
-          <a:p>
-            <a:pPr algn="ctr"/>
-            <a:endParaRPr/>
+              <a:t>OnDrawGizmos</a:t>
+            </a:r>
+            <a:r>
+              <a:rPr sz="1100" b="0" i="0" dirty="0">
+                <a:solidFill>
+                  <a:srgbClr val="333333"/>
+                </a:solidFill>
+                <a:latin typeface="맑은 고딕"/>
+              </a:rPr>
+              <a:t> 로 </a:t>
+            </a:r>
+            <a:r>
+              <a:rPr sz="1100" b="0" i="0" dirty="0" err="1">
+                <a:solidFill>
+                  <a:srgbClr val="333333"/>
+                </a:solidFill>
+                <a:latin typeface="맑은 고딕"/>
+              </a:rPr>
+              <a:t>씬뷰에</a:t>
+            </a:r>
+            <a:r>
+              <a:rPr sz="1100" b="0" i="0" dirty="0">
+                <a:solidFill>
+                  <a:srgbClr val="333333"/>
+                </a:solidFill>
+                <a:latin typeface="맑은 고딕"/>
+              </a:rPr>
+              <a:t> 점 + 선 </a:t>
+            </a:r>
+            <a:r>
+              <a:rPr sz="1100" b="0" i="0" dirty="0" err="1">
+                <a:solidFill>
+                  <a:srgbClr val="333333"/>
+                </a:solidFill>
+                <a:latin typeface="맑은 고딕"/>
+              </a:rPr>
+              <a:t>표시</a:t>
+            </a:r>
+            <a:r>
+              <a:rPr sz="1100" b="0" i="0" dirty="0">
+                <a:solidFill>
+                  <a:srgbClr val="333333"/>
+                </a:solidFill>
+                <a:latin typeface="맑은 고딕"/>
+              </a:rPr>
+              <a:t> (</a:t>
+            </a:r>
+            <a:r>
+              <a:rPr sz="1100" b="0" i="0" dirty="0" err="1">
+                <a:solidFill>
+                  <a:srgbClr val="333333"/>
+                </a:solidFill>
+                <a:latin typeface="맑은 고딕"/>
+              </a:rPr>
+              <a:t>디자이너</a:t>
+            </a:r>
+            <a:r>
+              <a:rPr sz="1100" b="0" i="0" dirty="0">
+                <a:solidFill>
+                  <a:srgbClr val="333333"/>
+                </a:solidFill>
+                <a:latin typeface="맑은 고딕"/>
+              </a:rPr>
+              <a:t> </a:t>
+            </a:r>
+            <a:r>
+              <a:rPr sz="1100" b="0" i="0" dirty="0" err="1">
+                <a:solidFill>
+                  <a:srgbClr val="333333"/>
+                </a:solidFill>
+                <a:latin typeface="맑은 고딕"/>
+              </a:rPr>
+              <a:t>친화</a:t>
+            </a:r>
+            <a:r>
+              <a:rPr sz="1100" b="0" i="0" dirty="0">
+                <a:solidFill>
+                  <a:srgbClr val="333333"/>
+                </a:solidFill>
+                <a:latin typeface="맑은 고딕"/>
+              </a:rPr>
+              <a:t>)</a:t>
+            </a:r>
+          </a:p>
+          <a:p>
+            <a:pPr algn="l"/>
+            <a:r>
+              <a:rPr sz="1100" b="0" i="0" dirty="0">
+                <a:solidFill>
+                  <a:srgbClr val="333333"/>
+                </a:solidFill>
+                <a:latin typeface="맑은 고딕"/>
+              </a:rPr>
+              <a:t>· </a:t>
+            </a:r>
+            <a:r>
+              <a:rPr sz="1100" b="0" i="0" dirty="0" err="1">
+                <a:solidFill>
+                  <a:srgbClr val="333333"/>
+                </a:solidFill>
+                <a:latin typeface="맑은 고딕"/>
+              </a:rPr>
+              <a:t>EnemyPath</a:t>
+            </a:r>
+            <a:r>
+              <a:rPr sz="1100" b="0" i="0" dirty="0">
+                <a:solidFill>
+                  <a:srgbClr val="333333"/>
+                </a:solidFill>
+                <a:latin typeface="맑은 고딕"/>
+              </a:rPr>
+              <a:t> </a:t>
+            </a:r>
+            <a:r>
+              <a:rPr sz="1100" b="0" i="0" dirty="0" err="1">
+                <a:solidFill>
+                  <a:srgbClr val="333333"/>
+                </a:solidFill>
+                <a:latin typeface="맑은 고딕"/>
+              </a:rPr>
+              <a:t>여러</a:t>
+            </a:r>
+            <a:r>
+              <a:rPr sz="1100" b="0" i="0" dirty="0">
+                <a:solidFill>
+                  <a:srgbClr val="333333"/>
+                </a:solidFill>
+                <a:latin typeface="맑은 고딕"/>
+              </a:rPr>
+              <a:t> 개 = </a:t>
+            </a:r>
+            <a:r>
+              <a:rPr sz="1100" b="0" i="0" dirty="0" err="1">
+                <a:solidFill>
+                  <a:srgbClr val="333333"/>
+                </a:solidFill>
+                <a:latin typeface="맑은 고딕"/>
+              </a:rPr>
+              <a:t>즉시</a:t>
+            </a:r>
+            <a:r>
+              <a:rPr sz="1100" b="0" i="0" dirty="0">
+                <a:solidFill>
+                  <a:srgbClr val="333333"/>
+                </a:solidFill>
+                <a:latin typeface="맑은 고딕"/>
+              </a:rPr>
+              <a:t> </a:t>
+            </a:r>
+            <a:r>
+              <a:rPr sz="1100" b="0" i="0" dirty="0" err="1">
+                <a:solidFill>
+                  <a:srgbClr val="333333"/>
+                </a:solidFill>
+                <a:latin typeface="맑은 고딕"/>
+              </a:rPr>
+              <a:t>다중</a:t>
+            </a:r>
+            <a:r>
+              <a:rPr sz="1100" b="0" i="0" dirty="0">
+                <a:solidFill>
+                  <a:srgbClr val="333333"/>
+                </a:solidFill>
+                <a:latin typeface="맑은 고딕"/>
+              </a:rPr>
+              <a:t> </a:t>
+            </a:r>
+            <a:r>
+              <a:rPr sz="1100" b="0" i="0" dirty="0" err="1">
+                <a:solidFill>
+                  <a:srgbClr val="333333"/>
+                </a:solidFill>
+                <a:latin typeface="맑은 고딕"/>
+              </a:rPr>
+              <a:t>경로</a:t>
+            </a:r>
+            <a:r>
+              <a:rPr sz="1100" b="0" i="0" dirty="0">
+                <a:solidFill>
+                  <a:srgbClr val="333333"/>
+                </a:solidFill>
+                <a:latin typeface="맑은 고딕"/>
+              </a:rPr>
+              <a:t> </a:t>
+            </a:r>
+            <a:r>
+              <a:rPr sz="1100" b="0" i="0" dirty="0" err="1">
+                <a:solidFill>
+                  <a:srgbClr val="333333"/>
+                </a:solidFill>
+                <a:latin typeface="맑은 고딕"/>
+              </a:rPr>
+              <a:t>지원</a:t>
+            </a:r>
+            <a:endParaRPr sz="1100" b="0" i="0" dirty="0">
+              <a:solidFill>
+                <a:srgbClr val="333333"/>
+              </a:solidFill>
+              <a:latin typeface="맑은 고딕"/>
+            </a:endParaRPr>
           </a:p>
         </p:txBody>
       </p:sp>
@@ -3775,7 +4123,7 @@
         </p:nvSpPr>
         <p:spPr>
           <a:xfrm>
-            <a:off x="5943600" y="2057400"/>
+            <a:off x="8406136" y="3187051"/>
             <a:ext cx="164592" cy="164592"/>
           </a:xfrm>
           <a:prstGeom prst="rect">
@@ -3820,7 +4168,7 @@
         </p:nvSpPr>
         <p:spPr>
           <a:xfrm>
-            <a:off x="6263640" y="2103120"/>
+            <a:off x="6751874" y="2218866"/>
             <a:ext cx="73152" cy="73152"/>
           </a:xfrm>
           <a:prstGeom prst="rect">
@@ -3865,7 +4213,7 @@
         </p:nvSpPr>
         <p:spPr>
           <a:xfrm>
-            <a:off x="6766559" y="2103120"/>
+            <a:off x="7491735" y="2715768"/>
             <a:ext cx="73152" cy="73152"/>
           </a:xfrm>
           <a:prstGeom prst="rect">
@@ -3910,7 +4258,7 @@
         </p:nvSpPr>
         <p:spPr>
           <a:xfrm>
-            <a:off x="7269479" y="2103120"/>
+            <a:off x="8146764" y="3232771"/>
             <a:ext cx="73152" cy="73152"/>
           </a:xfrm>
           <a:prstGeom prst="rect">
@@ -3949,13 +4297,183 @@
       </p:sp>
       <p:sp>
         <p:nvSpPr>
-          <p:cNvPr id="12" name="Rectangle 11"/>
+          <p:cNvPr id="13" name="TextBox 12"/>
+          <p:cNvSpPr txBox="1"/>
+          <p:nvPr/>
+        </p:nvSpPr>
+        <p:spPr>
+          <a:xfrm>
+            <a:off x="4809743" y="3154680"/>
+            <a:ext cx="365760" cy="274320"/>
+          </a:xfrm>
+          <a:prstGeom prst="rect">
+            <a:avLst/>
+          </a:prstGeom>
+          <a:noFill/>
+        </p:spPr>
+        <p:txBody>
+          <a:bodyPr wrap="square" lIns="25400" tIns="12700" rIns="25400" bIns="12700" anchor="t">
+            <a:spAutoFit/>
+          </a:bodyPr>
+          <a:lstStyle/>
+          <a:p>
+            <a:pPr algn="l"/>
+            <a:r>
+              <a:rPr sz="1100" b="1" i="0" dirty="0">
+                <a:solidFill>
+                  <a:srgbClr val="1E2761"/>
+                </a:solidFill>
+                <a:latin typeface="맑은 고딕"/>
+              </a:rPr>
+              <a:t>L</a:t>
+            </a:r>
+          </a:p>
+        </p:txBody>
+      </p:sp>
+      <p:sp>
+        <p:nvSpPr>
+          <p:cNvPr id="14" name="Rectangle 13"/>
           <p:cNvSpPr/>
           <p:nvPr/>
         </p:nvSpPr>
         <p:spPr>
           <a:xfrm>
-            <a:off x="7818120" y="2057400"/>
+            <a:off x="6638543" y="3598601"/>
+            <a:ext cx="164592" cy="164592"/>
+          </a:xfrm>
+          <a:prstGeom prst="rect">
+            <a:avLst/>
+          </a:prstGeom>
+          <a:solidFill>
+            <a:srgbClr val="1E2761"/>
+          </a:solidFill>
+          <a:ln>
+            <a:noFill/>
+          </a:ln>
+          <a:effectLst/>
+        </p:spPr>
+        <p:style>
+          <a:lnRef idx="1">
+            <a:schemeClr val="accent1"/>
+          </a:lnRef>
+          <a:fillRef idx="3">
+            <a:schemeClr val="accent1"/>
+          </a:fillRef>
+          <a:effectRef idx="2">
+            <a:schemeClr val="accent1"/>
+          </a:effectRef>
+          <a:fontRef idx="minor">
+            <a:schemeClr val="lt1"/>
+          </a:fontRef>
+        </p:style>
+        <p:txBody>
+          <a:bodyPr rtlCol="0" anchor="ctr"/>
+          <a:lstStyle/>
+          <a:p>
+            <a:pPr algn="ctr"/>
+            <a:endParaRPr/>
+          </a:p>
+        </p:txBody>
+      </p:sp>
+      <p:sp>
+        <p:nvSpPr>
+          <p:cNvPr id="15" name="Rectangle 14"/>
+          <p:cNvSpPr/>
+          <p:nvPr/>
+        </p:nvSpPr>
+        <p:spPr>
+          <a:xfrm>
+            <a:off x="5655263" y="2276856"/>
+            <a:ext cx="73152" cy="73152"/>
+          </a:xfrm>
+          <a:prstGeom prst="rect">
+            <a:avLst/>
+          </a:prstGeom>
+          <a:solidFill>
+            <a:srgbClr val="F59E0B"/>
+          </a:solidFill>
+          <a:ln>
+            <a:noFill/>
+          </a:ln>
+          <a:effectLst/>
+        </p:spPr>
+        <p:style>
+          <a:lnRef idx="1">
+            <a:schemeClr val="accent1"/>
+          </a:lnRef>
+          <a:fillRef idx="3">
+            <a:schemeClr val="accent1"/>
+          </a:fillRef>
+          <a:effectRef idx="2">
+            <a:schemeClr val="accent1"/>
+          </a:effectRef>
+          <a:fontRef idx="minor">
+            <a:schemeClr val="lt1"/>
+          </a:fontRef>
+        </p:style>
+        <p:txBody>
+          <a:bodyPr rtlCol="0" anchor="ctr"/>
+          <a:lstStyle/>
+          <a:p>
+            <a:pPr algn="ctr"/>
+            <a:endParaRPr/>
+          </a:p>
+        </p:txBody>
+      </p:sp>
+      <p:sp>
+        <p:nvSpPr>
+          <p:cNvPr id="16" name="Rectangle 15"/>
+          <p:cNvSpPr/>
+          <p:nvPr/>
+        </p:nvSpPr>
+        <p:spPr>
+          <a:xfrm>
+            <a:off x="6684263" y="3220023"/>
+            <a:ext cx="73152" cy="73152"/>
+          </a:xfrm>
+          <a:prstGeom prst="rect">
+            <a:avLst/>
+          </a:prstGeom>
+          <a:solidFill>
+            <a:srgbClr val="F59E0B"/>
+          </a:solidFill>
+          <a:ln>
+            <a:noFill/>
+          </a:ln>
+          <a:effectLst/>
+        </p:spPr>
+        <p:style>
+          <a:lnRef idx="1">
+            <a:schemeClr val="accent1"/>
+          </a:lnRef>
+          <a:fillRef idx="3">
+            <a:schemeClr val="accent1"/>
+          </a:fillRef>
+          <a:effectRef idx="2">
+            <a:schemeClr val="accent1"/>
+          </a:effectRef>
+          <a:fontRef idx="minor">
+            <a:schemeClr val="lt1"/>
+          </a:fontRef>
+        </p:style>
+        <p:txBody>
+          <a:bodyPr rtlCol="0" anchor="ctr"/>
+          <a:lstStyle/>
+          <a:p>
+            <a:pPr algn="ctr"/>
+            <a:endParaRPr/>
+          </a:p>
+        </p:txBody>
+      </p:sp>
+      <p:sp>
+        <p:nvSpPr>
+          <p:cNvPr id="18" name="Rectangle 17"/>
+          <p:cNvSpPr/>
+          <p:nvPr/>
+        </p:nvSpPr>
+        <p:spPr>
+          <a:xfrm>
+            <a:off x="6697244" y="1770356"/>
             <a:ext cx="164592" cy="164592"/>
           </a:xfrm>
           <a:prstGeom prst="rect">
@@ -3994,48 +4512,54 @@
       </p:sp>
       <p:sp>
         <p:nvSpPr>
-          <p:cNvPr id="13" name="TextBox 12"/>
-          <p:cNvSpPr txBox="1"/>
-          <p:nvPr/>
-        </p:nvSpPr>
-        <p:spPr>
-          <a:xfrm>
-            <a:off x="8092440" y="2029968"/>
-            <a:ext cx="365760" cy="274320"/>
-          </a:xfrm>
-          <a:prstGeom prst="rect">
-            <a:avLst/>
-          </a:prstGeom>
-          <a:noFill/>
-        </p:spPr>
-        <p:txBody>
-          <a:bodyPr wrap="square" lIns="25400" tIns="12700" rIns="25400" bIns="12700" anchor="t">
-            <a:spAutoFit/>
-          </a:bodyPr>
-          <a:lstStyle/>
-          <a:p>
-            <a:pPr algn="l"/>
-            <a:r>
-              <a:rPr sz="1100" b="1" i="0">
+          <p:cNvPr id="19" name="TextBox 18"/>
+          <p:cNvSpPr txBox="1"/>
+          <p:nvPr/>
+        </p:nvSpPr>
+        <p:spPr>
+          <a:xfrm>
+            <a:off x="6620255" y="3763193"/>
+            <a:ext cx="219456" cy="194925"/>
+          </a:xfrm>
+          <a:prstGeom prst="rect">
+            <a:avLst/>
+          </a:prstGeom>
+          <a:noFill/>
+        </p:spPr>
+        <p:txBody>
+          <a:bodyPr wrap="square" lIns="25400" tIns="12700" rIns="25400" bIns="12700" anchor="t">
+            <a:spAutoFit/>
+          </a:bodyPr>
+          <a:lstStyle/>
+          <a:p>
+            <a:pPr algn="l"/>
+            <a:r>
+              <a:rPr lang="en-US" sz="1100" b="1" dirty="0" smtClean="0">
                 <a:solidFill>
                   <a:srgbClr val="1E2761"/>
                 </a:solidFill>
                 <a:latin typeface="맑은 고딕"/>
               </a:rPr>
-              <a:t>L</a:t>
-            </a:r>
-          </a:p>
-        </p:txBody>
-      </p:sp>
-      <p:sp>
-        <p:nvSpPr>
-          <p:cNvPr id="14" name="Rectangle 13"/>
+              <a:t>CL</a:t>
+            </a:r>
+            <a:endParaRPr sz="1100" b="1" i="0" dirty="0">
+              <a:solidFill>
+                <a:srgbClr val="1E2761"/>
+              </a:solidFill>
+              <a:latin typeface="맑은 고딕"/>
+            </a:endParaRPr>
+          </a:p>
+        </p:txBody>
+      </p:sp>
+      <p:sp>
+        <p:nvSpPr>
+          <p:cNvPr id="20" name="Rectangle 19"/>
           <p:cNvSpPr/>
           <p:nvPr/>
         </p:nvSpPr>
         <p:spPr>
           <a:xfrm>
-            <a:off x="5943600" y="2743200"/>
+            <a:off x="5074785" y="3187051"/>
             <a:ext cx="164592" cy="164592"/>
           </a:xfrm>
           <a:prstGeom prst="rect">
@@ -4074,13 +4598,13 @@
       </p:sp>
       <p:sp>
         <p:nvSpPr>
-          <p:cNvPr id="15" name="Rectangle 14"/>
+          <p:cNvPr id="21" name="Rectangle 20"/>
           <p:cNvSpPr/>
           <p:nvPr/>
         </p:nvSpPr>
         <p:spPr>
           <a:xfrm>
-            <a:off x="6263640" y="2788920"/>
+            <a:off x="5870448" y="3218688"/>
             <a:ext cx="73152" cy="73152"/>
           </a:xfrm>
           <a:prstGeom prst="rect">
@@ -4119,13 +4643,13 @@
       </p:sp>
       <p:sp>
         <p:nvSpPr>
-          <p:cNvPr id="16" name="Rectangle 15"/>
+          <p:cNvPr id="22" name="Rectangle 21"/>
           <p:cNvSpPr/>
           <p:nvPr/>
         </p:nvSpPr>
         <p:spPr>
           <a:xfrm>
-            <a:off x="6766559" y="2788920"/>
+            <a:off x="5877389" y="2750360"/>
             <a:ext cx="73152" cy="73152"/>
           </a:xfrm>
           <a:prstGeom prst="rect">
@@ -4164,13 +4688,245 @@
       </p:sp>
       <p:sp>
         <p:nvSpPr>
-          <p:cNvPr id="17" name="Rectangle 16"/>
+          <p:cNvPr id="25" name="TextBox 24"/>
+          <p:cNvSpPr txBox="1"/>
+          <p:nvPr/>
+        </p:nvSpPr>
+        <p:spPr>
+          <a:xfrm>
+            <a:off x="8613647" y="3132187"/>
+            <a:ext cx="365760" cy="274320"/>
+          </a:xfrm>
+          <a:prstGeom prst="rect">
+            <a:avLst/>
+          </a:prstGeom>
+          <a:noFill/>
+        </p:spPr>
+        <p:txBody>
+          <a:bodyPr wrap="square" lIns="25400" tIns="12700" rIns="25400" bIns="12700" anchor="t">
+            <a:spAutoFit/>
+          </a:bodyPr>
+          <a:lstStyle/>
+          <a:p>
+            <a:pPr algn="l"/>
+            <a:r>
+              <a:rPr sz="1100" b="1" i="0" dirty="0">
+                <a:solidFill>
+                  <a:srgbClr val="1E2761"/>
+                </a:solidFill>
+                <a:latin typeface="맑은 고딕"/>
+              </a:rPr>
+              <a:t>R</a:t>
+            </a:r>
+          </a:p>
+        </p:txBody>
+      </p:sp>
+      <p:sp>
+        <p:nvSpPr>
+          <p:cNvPr id="26" name="TextBox 25"/>
+          <p:cNvSpPr txBox="1"/>
+          <p:nvPr/>
+        </p:nvSpPr>
+        <p:spPr>
+          <a:xfrm>
+            <a:off x="5943600" y="4160520"/>
+            <a:ext cx="2560320" cy="274320"/>
+          </a:xfrm>
+          <a:prstGeom prst="rect">
+            <a:avLst/>
+          </a:prstGeom>
+          <a:noFill/>
+        </p:spPr>
+        <p:txBody>
+          <a:bodyPr wrap="square" lIns="25400" tIns="12700" rIns="25400" bIns="12700" anchor="t">
+            <a:spAutoFit/>
+          </a:bodyPr>
+          <a:lstStyle/>
+          <a:p>
+            <a:pPr algn="l"/>
+            <a:r>
+              <a:rPr sz="900" b="0" i="0" dirty="0">
+                <a:solidFill>
+                  <a:srgbClr val="555555"/>
+                </a:solidFill>
+                <a:latin typeface="맑은 고딕"/>
+              </a:rPr>
+              <a:t>●</a:t>
+            </a:r>
+            <a:r>
+              <a:rPr sz="900" b="0" i="0" dirty="0" err="1">
+                <a:solidFill>
+                  <a:srgbClr val="555555"/>
+                </a:solidFill>
+                <a:latin typeface="맑은 고딕"/>
+              </a:rPr>
+              <a:t>스폰</a:t>
+            </a:r>
+            <a:r>
+              <a:rPr sz="900" b="0" i="0" dirty="0">
+                <a:solidFill>
+                  <a:srgbClr val="555555"/>
+                </a:solidFill>
+                <a:latin typeface="맑은 고딕"/>
+              </a:rPr>
+              <a:t>  ◆</a:t>
+            </a:r>
+            <a:r>
+              <a:rPr sz="900" b="0" i="0" dirty="0" err="1">
+                <a:solidFill>
+                  <a:srgbClr val="555555"/>
+                </a:solidFill>
+                <a:latin typeface="맑은 고딕"/>
+              </a:rPr>
+              <a:t>웨이포인트</a:t>
+            </a:r>
+            <a:r>
+              <a:rPr sz="900" b="0" i="0" dirty="0">
+                <a:solidFill>
+                  <a:srgbClr val="555555"/>
+                </a:solidFill>
+                <a:latin typeface="맑은 고딕"/>
+              </a:rPr>
+              <a:t>  ●</a:t>
+            </a:r>
+            <a:r>
+              <a:rPr sz="900" b="0" i="0" dirty="0" err="1">
+                <a:solidFill>
+                  <a:srgbClr val="555555"/>
+                </a:solidFill>
+                <a:latin typeface="맑은 고딕"/>
+              </a:rPr>
+              <a:t>골인</a:t>
+            </a:r>
+            <a:endParaRPr sz="900" b="0" i="0" dirty="0">
+              <a:solidFill>
+                <a:srgbClr val="555555"/>
+              </a:solidFill>
+              <a:latin typeface="맑은 고딕"/>
+            </a:endParaRPr>
+          </a:p>
+        </p:txBody>
+      </p:sp>
+      <p:sp>
+        <p:nvSpPr>
+          <p:cNvPr id="27" name="TextBox 26"/>
+          <p:cNvSpPr txBox="1"/>
+          <p:nvPr/>
+        </p:nvSpPr>
+        <p:spPr>
+          <a:xfrm>
+            <a:off x="457200" y="4809744"/>
+            <a:ext cx="5486400" cy="228600"/>
+          </a:xfrm>
+          <a:prstGeom prst="rect">
+            <a:avLst/>
+          </a:prstGeom>
+          <a:noFill/>
+        </p:spPr>
+        <p:txBody>
+          <a:bodyPr wrap="square" lIns="25400" tIns="12700" rIns="25400" bIns="12700" anchor="t">
+            <a:spAutoFit/>
+          </a:bodyPr>
+          <a:lstStyle/>
+          <a:p>
+            <a:pPr algn="l"/>
+            <a:r>
+              <a:rPr sz="900" b="0" i="0">
+                <a:solidFill>
+                  <a:srgbClr val="999999"/>
+                </a:solidFill>
+                <a:latin typeface="맑은 고딕"/>
+              </a:rPr>
+              <a:t>Unity 2D Tower Defense  ·  김성수</a:t>
+            </a:r>
+          </a:p>
+        </p:txBody>
+      </p:sp>
+      <p:sp>
+        <p:nvSpPr>
+          <p:cNvPr id="28" name="TextBox 27"/>
+          <p:cNvSpPr txBox="1"/>
+          <p:nvPr/>
+        </p:nvSpPr>
+        <p:spPr>
+          <a:xfrm>
+            <a:off x="8046720" y="4809744"/>
+            <a:ext cx="640080" cy="228600"/>
+          </a:xfrm>
+          <a:prstGeom prst="rect">
+            <a:avLst/>
+          </a:prstGeom>
+          <a:noFill/>
+        </p:spPr>
+        <p:txBody>
+          <a:bodyPr wrap="square" lIns="25400" tIns="12700" rIns="25400" bIns="12700" anchor="t">
+            <a:spAutoFit/>
+          </a:bodyPr>
+          <a:lstStyle/>
+          <a:p>
+            <a:pPr algn="r"/>
+            <a:r>
+              <a:rPr sz="900" b="0" i="0">
+                <a:solidFill>
+                  <a:srgbClr val="999999"/>
+                </a:solidFill>
+                <a:latin typeface="맑은 고딕"/>
+              </a:rPr>
+              <a:t>9 / 19</a:t>
+            </a:r>
+          </a:p>
+        </p:txBody>
+      </p:sp>
+      <p:sp>
+        <p:nvSpPr>
+          <p:cNvPr id="30" name="TextBox 29"/>
+          <p:cNvSpPr txBox="1"/>
+          <p:nvPr/>
+        </p:nvSpPr>
+        <p:spPr>
+          <a:xfrm>
+            <a:off x="6840466" y="3763193"/>
+            <a:ext cx="274499" cy="194925"/>
+          </a:xfrm>
+          <a:prstGeom prst="rect">
+            <a:avLst/>
+          </a:prstGeom>
+          <a:noFill/>
+        </p:spPr>
+        <p:txBody>
+          <a:bodyPr wrap="square" lIns="25400" tIns="12700" rIns="25400" bIns="12700" anchor="t">
+            <a:spAutoFit/>
+          </a:bodyPr>
+          <a:lstStyle/>
+          <a:p>
+            <a:pPr algn="l"/>
+            <a:r>
+              <a:rPr lang="en-US" sz="1100" b="1" dirty="0" smtClean="0">
+                <a:solidFill>
+                  <a:srgbClr val="1E2761"/>
+                </a:solidFill>
+                <a:latin typeface="맑은 고딕"/>
+              </a:rPr>
+              <a:t>CR</a:t>
+            </a:r>
+            <a:endParaRPr sz="1100" b="1" i="0" dirty="0">
+              <a:solidFill>
+                <a:srgbClr val="1E2761"/>
+              </a:solidFill>
+              <a:latin typeface="맑은 고딕"/>
+            </a:endParaRPr>
+          </a:p>
+        </p:txBody>
+      </p:sp>
+      <p:sp>
+        <p:nvSpPr>
+          <p:cNvPr id="31" name="Rectangle 22"/>
           <p:cNvSpPr/>
           <p:nvPr/>
         </p:nvSpPr>
         <p:spPr>
           <a:xfrm>
-            <a:off x="7269479" y="2788920"/>
+            <a:off x="6747872" y="2715768"/>
             <a:ext cx="73152" cy="73152"/>
           </a:xfrm>
           <a:prstGeom prst="rect">
@@ -4209,20 +4965,20 @@
       </p:sp>
       <p:sp>
         <p:nvSpPr>
-          <p:cNvPr id="18" name="Rectangle 17"/>
+          <p:cNvPr id="32" name="Rectangle 10"/>
           <p:cNvSpPr/>
           <p:nvPr/>
         </p:nvSpPr>
         <p:spPr>
           <a:xfrm>
-            <a:off x="7818120" y="2743200"/>
-            <a:ext cx="164592" cy="164592"/>
+            <a:off x="7498078" y="3218688"/>
+            <a:ext cx="73152" cy="73152"/>
           </a:xfrm>
           <a:prstGeom prst="rect">
             <a:avLst/>
           </a:prstGeom>
           <a:solidFill>
-            <a:srgbClr val="DC2626"/>
+            <a:srgbClr val="F59E0B"/>
           </a:solidFill>
           <a:ln>
             <a:noFill/>
@@ -4254,48 +5010,103 @@
       </p:sp>
       <p:sp>
         <p:nvSpPr>
-          <p:cNvPr id="19" name="TextBox 18"/>
-          <p:cNvSpPr txBox="1"/>
-          <p:nvPr/>
-        </p:nvSpPr>
-        <p:spPr>
-          <a:xfrm>
-            <a:off x="8092440" y="2715768"/>
-            <a:ext cx="365760" cy="274320"/>
-          </a:xfrm>
-          <a:prstGeom prst="rect">
-            <a:avLst/>
-          </a:prstGeom>
-          <a:noFill/>
-        </p:spPr>
-        <p:txBody>
-          <a:bodyPr wrap="square" lIns="25400" tIns="12700" rIns="25400" bIns="12700" anchor="t">
-            <a:spAutoFit/>
-          </a:bodyPr>
-          <a:lstStyle/>
-          <a:p>
-            <a:pPr algn="l"/>
-            <a:r>
-              <a:rPr sz="1100" b="1" i="0">
-                <a:solidFill>
-                  <a:srgbClr val="1E2761"/>
-                </a:solidFill>
-                <a:latin typeface="맑은 고딕"/>
-              </a:rPr>
-              <a:t>M</a:t>
-            </a:r>
-          </a:p>
-        </p:txBody>
-      </p:sp>
-      <p:sp>
-        <p:nvSpPr>
-          <p:cNvPr id="20" name="Rectangle 19"/>
+          <p:cNvPr id="33" name="Rectangle 9"/>
           <p:cNvSpPr/>
           <p:nvPr/>
         </p:nvSpPr>
         <p:spPr>
           <a:xfrm>
-            <a:off x="5943600" y="3429000"/>
+            <a:off x="7948490" y="2715768"/>
+            <a:ext cx="73152" cy="73152"/>
+          </a:xfrm>
+          <a:prstGeom prst="rect">
+            <a:avLst/>
+          </a:prstGeom>
+          <a:solidFill>
+            <a:srgbClr val="F59E0B"/>
+          </a:solidFill>
+          <a:ln>
+            <a:noFill/>
+          </a:ln>
+          <a:effectLst/>
+        </p:spPr>
+        <p:style>
+          <a:lnRef idx="1">
+            <a:schemeClr val="accent1"/>
+          </a:lnRef>
+          <a:fillRef idx="3">
+            <a:schemeClr val="accent1"/>
+          </a:fillRef>
+          <a:effectRef idx="2">
+            <a:schemeClr val="accent1"/>
+          </a:effectRef>
+          <a:fontRef idx="minor">
+            <a:schemeClr val="lt1"/>
+          </a:fontRef>
+        </p:style>
+        <p:txBody>
+          <a:bodyPr rtlCol="0" anchor="ctr"/>
+          <a:lstStyle/>
+          <a:p>
+            <a:pPr algn="ctr"/>
+            <a:endParaRPr/>
+          </a:p>
+        </p:txBody>
+      </p:sp>
+      <p:sp>
+        <p:nvSpPr>
+          <p:cNvPr id="34" name="Rectangle 9"/>
+          <p:cNvSpPr/>
+          <p:nvPr/>
+        </p:nvSpPr>
+        <p:spPr>
+          <a:xfrm>
+            <a:off x="7808974" y="2242264"/>
+            <a:ext cx="73152" cy="73152"/>
+          </a:xfrm>
+          <a:prstGeom prst="rect">
+            <a:avLst/>
+          </a:prstGeom>
+          <a:solidFill>
+            <a:srgbClr val="F59E0B"/>
+          </a:solidFill>
+          <a:ln>
+            <a:noFill/>
+          </a:ln>
+          <a:effectLst/>
+        </p:spPr>
+        <p:style>
+          <a:lnRef idx="1">
+            <a:schemeClr val="accent1"/>
+          </a:lnRef>
+          <a:fillRef idx="3">
+            <a:schemeClr val="accent1"/>
+          </a:fillRef>
+          <a:effectRef idx="2">
+            <a:schemeClr val="accent1"/>
+          </a:effectRef>
+          <a:fontRef idx="minor">
+            <a:schemeClr val="lt1"/>
+          </a:fontRef>
+        </p:style>
+        <p:txBody>
+          <a:bodyPr rtlCol="0" anchor="ctr"/>
+          <a:lstStyle/>
+          <a:p>
+            <a:pPr algn="ctr"/>
+            <a:endParaRPr/>
+          </a:p>
+        </p:txBody>
+      </p:sp>
+      <p:sp>
+        <p:nvSpPr>
+          <p:cNvPr id="35" name="Rectangle 13"/>
+          <p:cNvSpPr/>
+          <p:nvPr/>
+        </p:nvSpPr>
+        <p:spPr>
+          <a:xfrm>
+            <a:off x="6843802" y="3583893"/>
             <a:ext cx="164592" cy="164592"/>
           </a:xfrm>
           <a:prstGeom prst="rect">
@@ -4334,13 +5145,13 @@
       </p:sp>
       <p:sp>
         <p:nvSpPr>
-          <p:cNvPr id="21" name="Rectangle 20"/>
+          <p:cNvPr id="37" name="Rectangle 15"/>
           <p:cNvSpPr/>
           <p:nvPr/>
         </p:nvSpPr>
         <p:spPr>
           <a:xfrm>
-            <a:off x="6263640" y="3474720"/>
+            <a:off x="6895873" y="3222175"/>
             <a:ext cx="73152" cy="73152"/>
           </a:xfrm>
           <a:prstGeom prst="rect">
@@ -4377,282 +5188,12 @@
           </a:p>
         </p:txBody>
       </p:sp>
-      <p:sp>
-        <p:nvSpPr>
-          <p:cNvPr id="22" name="Rectangle 21"/>
-          <p:cNvSpPr/>
-          <p:nvPr/>
-        </p:nvSpPr>
-        <p:spPr>
-          <a:xfrm>
-            <a:off x="6766559" y="3474720"/>
-            <a:ext cx="73152" cy="73152"/>
-          </a:xfrm>
-          <a:prstGeom prst="rect">
-            <a:avLst/>
-          </a:prstGeom>
-          <a:solidFill>
-            <a:srgbClr val="F59E0B"/>
-          </a:solidFill>
-          <a:ln>
-            <a:noFill/>
-          </a:ln>
-          <a:effectLst/>
-        </p:spPr>
-        <p:style>
-          <a:lnRef idx="1">
-            <a:schemeClr val="accent1"/>
-          </a:lnRef>
-          <a:fillRef idx="3">
-            <a:schemeClr val="accent1"/>
-          </a:fillRef>
-          <a:effectRef idx="2">
-            <a:schemeClr val="accent1"/>
-          </a:effectRef>
-          <a:fontRef idx="minor">
-            <a:schemeClr val="lt1"/>
-          </a:fontRef>
-        </p:style>
-        <p:txBody>
-          <a:bodyPr rtlCol="0" anchor="ctr"/>
-          <a:lstStyle/>
-          <a:p>
-            <a:pPr algn="ctr"/>
-            <a:endParaRPr/>
-          </a:p>
-        </p:txBody>
-      </p:sp>
-      <p:sp>
-        <p:nvSpPr>
-          <p:cNvPr id="23" name="Rectangle 22"/>
-          <p:cNvSpPr/>
-          <p:nvPr/>
-        </p:nvSpPr>
-        <p:spPr>
-          <a:xfrm>
-            <a:off x="7269479" y="3474720"/>
-            <a:ext cx="73152" cy="73152"/>
-          </a:xfrm>
-          <a:prstGeom prst="rect">
-            <a:avLst/>
-          </a:prstGeom>
-          <a:solidFill>
-            <a:srgbClr val="F59E0B"/>
-          </a:solidFill>
-          <a:ln>
-            <a:noFill/>
-          </a:ln>
-          <a:effectLst/>
-        </p:spPr>
-        <p:style>
-          <a:lnRef idx="1">
-            <a:schemeClr val="accent1"/>
-          </a:lnRef>
-          <a:fillRef idx="3">
-            <a:schemeClr val="accent1"/>
-          </a:fillRef>
-          <a:effectRef idx="2">
-            <a:schemeClr val="accent1"/>
-          </a:effectRef>
-          <a:fontRef idx="minor">
-            <a:schemeClr val="lt1"/>
-          </a:fontRef>
-        </p:style>
-        <p:txBody>
-          <a:bodyPr rtlCol="0" anchor="ctr"/>
-          <a:lstStyle/>
-          <a:p>
-            <a:pPr algn="ctr"/>
-            <a:endParaRPr/>
-          </a:p>
-        </p:txBody>
-      </p:sp>
-      <p:sp>
-        <p:nvSpPr>
-          <p:cNvPr id="24" name="Rectangle 23"/>
-          <p:cNvSpPr/>
-          <p:nvPr/>
-        </p:nvSpPr>
-        <p:spPr>
-          <a:xfrm>
-            <a:off x="7818120" y="3429000"/>
-            <a:ext cx="164592" cy="164592"/>
-          </a:xfrm>
-          <a:prstGeom prst="rect">
-            <a:avLst/>
-          </a:prstGeom>
-          <a:solidFill>
-            <a:srgbClr val="DC2626"/>
-          </a:solidFill>
-          <a:ln>
-            <a:noFill/>
-          </a:ln>
-          <a:effectLst/>
-        </p:spPr>
-        <p:style>
-          <a:lnRef idx="1">
-            <a:schemeClr val="accent1"/>
-          </a:lnRef>
-          <a:fillRef idx="3">
-            <a:schemeClr val="accent1"/>
-          </a:fillRef>
-          <a:effectRef idx="2">
-            <a:schemeClr val="accent1"/>
-          </a:effectRef>
-          <a:fontRef idx="minor">
-            <a:schemeClr val="lt1"/>
-          </a:fontRef>
-        </p:style>
-        <p:txBody>
-          <a:bodyPr rtlCol="0" anchor="ctr"/>
-          <a:lstStyle/>
-          <a:p>
-            <a:pPr algn="ctr"/>
-            <a:endParaRPr/>
-          </a:p>
-        </p:txBody>
-      </p:sp>
-      <p:sp>
-        <p:nvSpPr>
-          <p:cNvPr id="25" name="TextBox 24"/>
-          <p:cNvSpPr txBox="1"/>
-          <p:nvPr/>
-        </p:nvSpPr>
-        <p:spPr>
-          <a:xfrm>
-            <a:off x="8092440" y="3401568"/>
-            <a:ext cx="365760" cy="274320"/>
-          </a:xfrm>
-          <a:prstGeom prst="rect">
-            <a:avLst/>
-          </a:prstGeom>
-          <a:noFill/>
-        </p:spPr>
-        <p:txBody>
-          <a:bodyPr wrap="square" lIns="25400" tIns="12700" rIns="25400" bIns="12700" anchor="t">
-            <a:spAutoFit/>
-          </a:bodyPr>
-          <a:lstStyle/>
-          <a:p>
-            <a:pPr algn="l"/>
-            <a:r>
-              <a:rPr sz="1100" b="1" i="0">
-                <a:solidFill>
-                  <a:srgbClr val="1E2761"/>
-                </a:solidFill>
-                <a:latin typeface="맑은 고딕"/>
-              </a:rPr>
-              <a:t>R</a:t>
-            </a:r>
-          </a:p>
-        </p:txBody>
-      </p:sp>
-      <p:sp>
-        <p:nvSpPr>
-          <p:cNvPr id="26" name="TextBox 25"/>
-          <p:cNvSpPr txBox="1"/>
-          <p:nvPr/>
-        </p:nvSpPr>
-        <p:spPr>
-          <a:xfrm>
-            <a:off x="5943600" y="4160520"/>
-            <a:ext cx="2560320" cy="274320"/>
-          </a:xfrm>
-          <a:prstGeom prst="rect">
-            <a:avLst/>
-          </a:prstGeom>
-          <a:noFill/>
-        </p:spPr>
-        <p:txBody>
-          <a:bodyPr wrap="square" lIns="25400" tIns="12700" rIns="25400" bIns="12700" anchor="t">
-            <a:spAutoFit/>
-          </a:bodyPr>
-          <a:lstStyle/>
-          <a:p>
-            <a:pPr algn="l"/>
-            <a:r>
-              <a:rPr sz="900" b="0" i="0">
-                <a:solidFill>
-                  <a:srgbClr val="555555"/>
-                </a:solidFill>
-                <a:latin typeface="맑은 고딕"/>
-              </a:rPr>
-              <a:t>●스폰  ◆웨이포인트  ●골인</a:t>
-            </a:r>
-          </a:p>
-        </p:txBody>
-      </p:sp>
-      <p:sp>
-        <p:nvSpPr>
-          <p:cNvPr id="27" name="TextBox 26"/>
-          <p:cNvSpPr txBox="1"/>
-          <p:nvPr/>
-        </p:nvSpPr>
-        <p:spPr>
-          <a:xfrm>
-            <a:off x="457200" y="4809744"/>
-            <a:ext cx="5486400" cy="228600"/>
-          </a:xfrm>
-          <a:prstGeom prst="rect">
-            <a:avLst/>
-          </a:prstGeom>
-          <a:noFill/>
-        </p:spPr>
-        <p:txBody>
-          <a:bodyPr wrap="square" lIns="25400" tIns="12700" rIns="25400" bIns="12700" anchor="t">
-            <a:spAutoFit/>
-          </a:bodyPr>
-          <a:lstStyle/>
-          <a:p>
-            <a:pPr algn="l"/>
-            <a:r>
-              <a:rPr sz="900" b="0" i="0">
-                <a:solidFill>
-                  <a:srgbClr val="999999"/>
-                </a:solidFill>
-                <a:latin typeface="맑은 고딕"/>
-              </a:rPr>
-              <a:t>Unity 2D Tower Defense  ·  김성수</a:t>
-            </a:r>
-          </a:p>
-        </p:txBody>
-      </p:sp>
-      <p:sp>
-        <p:nvSpPr>
-          <p:cNvPr id="28" name="TextBox 27"/>
-          <p:cNvSpPr txBox="1"/>
-          <p:nvPr/>
-        </p:nvSpPr>
-        <p:spPr>
-          <a:xfrm>
-            <a:off x="8046720" y="4809744"/>
-            <a:ext cx="640080" cy="228600"/>
-          </a:xfrm>
-          <a:prstGeom prst="rect">
-            <a:avLst/>
-          </a:prstGeom>
-          <a:noFill/>
-        </p:spPr>
-        <p:txBody>
-          <a:bodyPr wrap="square" lIns="25400" tIns="12700" rIns="25400" bIns="12700" anchor="t">
-            <a:spAutoFit/>
-          </a:bodyPr>
-          <a:lstStyle/>
-          <a:p>
-            <a:pPr algn="r"/>
-            <a:r>
-              <a:rPr sz="900" b="0" i="0">
-                <a:solidFill>
-                  <a:srgbClr val="999999"/>
-                </a:solidFill>
-                <a:latin typeface="맑은 고딕"/>
-              </a:rPr>
-              <a:t>9 / 19</a:t>
-            </a:r>
-          </a:p>
-        </p:txBody>
-      </p:sp>
     </p:spTree>
+    <p:extLst>
+      <p:ext uri="{BB962C8B-B14F-4D97-AF65-F5344CB8AC3E}">
+        <p14:creationId xmlns:p14="http://schemas.microsoft.com/office/powerpoint/2010/main" val="639499711"/>
+      </p:ext>
+    </p:extLst>
   </p:cSld>
   <p:clrMapOvr>
     <a:masterClrMapping/>
@@ -5815,141 +6356,13 @@
       </p:sp>
       <p:sp>
         <p:nvSpPr>
-          <p:cNvPr id="8" name="Rectangle 7"/>
-          <p:cNvSpPr/>
-          <p:nvPr/>
-        </p:nvSpPr>
-        <p:spPr>
-          <a:xfrm>
-            <a:off x="685800" y="2103120"/>
-            <a:ext cx="3931920" cy="1280160"/>
-          </a:xfrm>
-          <a:prstGeom prst="rect">
-            <a:avLst/>
-          </a:prstGeom>
-          <a:solidFill>
-            <a:srgbClr val="0F172A"/>
-          </a:solidFill>
-          <a:ln>
-            <a:noFill/>
-          </a:ln>
-          <a:effectLst/>
-        </p:spPr>
-        <p:style>
-          <a:lnRef idx="1">
-            <a:schemeClr val="accent1"/>
-          </a:lnRef>
-          <a:fillRef idx="3">
-            <a:schemeClr val="accent1"/>
-          </a:fillRef>
-          <a:effectRef idx="2">
-            <a:schemeClr val="accent1"/>
-          </a:effectRef>
-          <a:fontRef idx="minor">
-            <a:schemeClr val="lt1"/>
-          </a:fontRef>
-        </p:style>
-        <p:txBody>
-          <a:bodyPr rtlCol="0" anchor="ctr"/>
-          <a:lstStyle/>
-          <a:p>
-            <a:pPr algn="ctr"/>
-            <a:endParaRPr/>
-          </a:p>
-        </p:txBody>
-      </p:sp>
-      <p:sp>
-        <p:nvSpPr>
-          <p:cNvPr id="9" name="TextBox 8"/>
-          <p:cNvSpPr txBox="1"/>
-          <p:nvPr/>
-        </p:nvSpPr>
-        <p:spPr>
-          <a:xfrm>
-            <a:off x="822960" y="2176272"/>
-            <a:ext cx="3657600" cy="1170432"/>
-          </a:xfrm>
-          <a:prstGeom prst="rect">
-            <a:avLst/>
-          </a:prstGeom>
-          <a:noFill/>
-        </p:spPr>
-        <p:txBody>
-          <a:bodyPr wrap="square" lIns="25400" tIns="12700" rIns="25400" bIns="12700" anchor="t">
-            <a:spAutoFit/>
-          </a:bodyPr>
-          <a:lstStyle/>
-          <a:p>
-            <a:pPr algn="l"/>
-            <a:r>
-              <a:rPr sz="950" b="0" i="0">
-                <a:solidFill>
-                  <a:srgbClr val="99C5F0"/>
-                </a:solidFill>
-                <a:latin typeface="Consolas"/>
-              </a:rPr>
-              <a:t>public BuildingData nextUpgrade;</a:t>
-            </a:r>
-          </a:p>
-          <a:p>
-            <a:pPr algn="l"/>
-            <a:r>
-              <a:rPr sz="950" b="0" i="0">
-                <a:solidFill>
-                  <a:srgbClr val="99C5F0"/>
-                </a:solidFill>
-                <a:latin typeface="Consolas"/>
-              </a:rPr>
-              <a:t>public BuildingData[] nextBranches;</a:t>
-            </a:r>
-          </a:p>
-          <a:p>
-            <a:pPr algn="l"/>
-            <a:r>
-              <a:rPr sz="950" b="0" i="0">
-                <a:solidFill>
-                  <a:srgbClr val="99C5F0"/>
-                </a:solidFill>
-                <a:latin typeface="Consolas"/>
-              </a:rPr>
-              <a:t>public Sprite upgradeSlotIcon;  // NEW</a:t>
-            </a:r>
-          </a:p>
-          <a:p>
-            <a:pPr algn="l"/>
-            <a:r>
-              <a:rPr sz="950" b="0" i="0">
-                <a:solidFill>
-                  <a:srgbClr val="99C5F0"/>
-                </a:solidFill>
-                <a:latin typeface="Consolas"/>
-              </a:rPr>
-              <a:t>// 분기 1+ 이면 nextBranches 우선</a:t>
-            </a:r>
-          </a:p>
-          <a:p>
-            <a:pPr algn="l"/>
-            <a:r>
-              <a:rPr sz="950" b="0" i="0">
-                <a:solidFill>
-                  <a:srgbClr val="99C5F0"/>
-                </a:solidFill>
-                <a:latin typeface="Consolas"/>
-              </a:rPr>
-              <a:t>// 슬롯 아이콘은 분기별 시각 구분용</a:t>
-            </a:r>
-          </a:p>
-        </p:txBody>
-      </p:sp>
-      <p:sp>
-        <p:nvSpPr>
           <p:cNvPr id="10" name="TextBox 9"/>
           <p:cNvSpPr txBox="1"/>
           <p:nvPr/>
         </p:nvSpPr>
         <p:spPr>
           <a:xfrm>
-            <a:off x="685800" y="3520440"/>
+            <a:off x="640081" y="3276998"/>
             <a:ext cx="4023360" cy="1051560"/>
           </a:xfrm>
           <a:prstGeom prst="rect">
@@ -5996,441 +6409,6 @@
                 <a:latin typeface="맑은 고딕"/>
               </a:rPr>
               <a:t>· 새 upgradeSlotIcon 으로 분기 슬롯 시각화 (Polish)</a:t>
-            </a:r>
-          </a:p>
-        </p:txBody>
-      </p:sp>
-      <p:sp>
-        <p:nvSpPr>
-          <p:cNvPr id="11" name="Rectangle 10"/>
-          <p:cNvSpPr/>
-          <p:nvPr/>
-        </p:nvSpPr>
-        <p:spPr>
-          <a:xfrm>
-            <a:off x="4937760" y="1325880"/>
-            <a:ext cx="3749039" cy="3246120"/>
-          </a:xfrm>
-          <a:prstGeom prst="rect">
-            <a:avLst/>
-          </a:prstGeom>
-          <a:solidFill>
-            <a:srgbClr val="EEF3FB"/>
-          </a:solidFill>
-          <a:ln>
-            <a:noFill/>
-          </a:ln>
-          <a:effectLst/>
-        </p:spPr>
-        <p:style>
-          <a:lnRef idx="1">
-            <a:schemeClr val="accent1"/>
-          </a:lnRef>
-          <a:fillRef idx="3">
-            <a:schemeClr val="accent1"/>
-          </a:fillRef>
-          <a:effectRef idx="2">
-            <a:schemeClr val="accent1"/>
-          </a:effectRef>
-          <a:fontRef idx="minor">
-            <a:schemeClr val="lt1"/>
-          </a:fontRef>
-        </p:style>
-        <p:txBody>
-          <a:bodyPr rtlCol="0" anchor="ctr"/>
-          <a:lstStyle/>
-          <a:p>
-            <a:pPr algn="ctr"/>
-            <a:endParaRPr/>
-          </a:p>
-        </p:txBody>
-      </p:sp>
-      <p:sp>
-        <p:nvSpPr>
-          <p:cNvPr id="12" name="TextBox 11"/>
-          <p:cNvSpPr txBox="1"/>
-          <p:nvPr/>
-        </p:nvSpPr>
-        <p:spPr>
-          <a:xfrm>
-            <a:off x="5120640" y="1417320"/>
-            <a:ext cx="3474720" cy="274320"/>
-          </a:xfrm>
-          <a:prstGeom prst="rect">
-            <a:avLst/>
-          </a:prstGeom>
-          <a:noFill/>
-        </p:spPr>
-        <p:txBody>
-          <a:bodyPr wrap="square" lIns="25400" tIns="12700" rIns="25400" bIns="12700" anchor="t">
-            <a:spAutoFit/>
-          </a:bodyPr>
-          <a:lstStyle/>
-          <a:p>
-            <a:pPr algn="l"/>
-            <a:r>
-              <a:rPr sz="1100" b="1" i="0">
-                <a:solidFill>
-                  <a:srgbClr val="1E2761"/>
-                </a:solidFill>
-                <a:latin typeface="맑은 고딕"/>
-              </a:rPr>
-              <a:t>라디얼 메뉴 분기 표시</a:t>
-            </a:r>
-          </a:p>
-        </p:txBody>
-      </p:sp>
-      <p:sp>
-        <p:nvSpPr>
-          <p:cNvPr id="13" name="Rectangle 12"/>
-          <p:cNvSpPr/>
-          <p:nvPr/>
-        </p:nvSpPr>
-        <p:spPr>
-          <a:xfrm>
-            <a:off x="6172200" y="2240280"/>
-            <a:ext cx="1005840" cy="1005840"/>
-          </a:xfrm>
-          <a:prstGeom prst="rect">
-            <a:avLst/>
-          </a:prstGeom>
-          <a:solidFill>
-            <a:srgbClr val="1E2761"/>
-          </a:solidFill>
-          <a:ln>
-            <a:noFill/>
-          </a:ln>
-          <a:effectLst/>
-        </p:spPr>
-        <p:style>
-          <a:lnRef idx="1">
-            <a:schemeClr val="accent1"/>
-          </a:lnRef>
-          <a:fillRef idx="3">
-            <a:schemeClr val="accent1"/>
-          </a:fillRef>
-          <a:effectRef idx="2">
-            <a:schemeClr val="accent1"/>
-          </a:effectRef>
-          <a:fontRef idx="minor">
-            <a:schemeClr val="lt1"/>
-          </a:fontRef>
-        </p:style>
-        <p:txBody>
-          <a:bodyPr rtlCol="0" anchor="ctr"/>
-          <a:lstStyle/>
-          <a:p>
-            <a:pPr algn="ctr"/>
-            <a:endParaRPr/>
-          </a:p>
-        </p:txBody>
-      </p:sp>
-      <p:sp>
-        <p:nvSpPr>
-          <p:cNvPr id="14" name="TextBox 13"/>
-          <p:cNvSpPr txBox="1"/>
-          <p:nvPr/>
-        </p:nvSpPr>
-        <p:spPr>
-          <a:xfrm>
-            <a:off x="6172200" y="2240280"/>
-            <a:ext cx="1005840" cy="1005840"/>
-          </a:xfrm>
-          <a:prstGeom prst="rect">
-            <a:avLst/>
-          </a:prstGeom>
-          <a:noFill/>
-        </p:spPr>
-        <p:txBody>
-          <a:bodyPr wrap="square" lIns="25400" tIns="12700" rIns="25400" bIns="12700" anchor="ctr">
-            <a:spAutoFit/>
-          </a:bodyPr>
-          <a:lstStyle/>
-          <a:p>
-            <a:pPr algn="ctr"/>
-            <a:r>
-              <a:rPr sz="1100" b="1" i="0">
-                <a:solidFill>
-                  <a:srgbClr val="FFFFFF"/>
-                </a:solidFill>
-                <a:latin typeface="맑은 고딕"/>
-              </a:rPr>
-              <a:t>TOWER</a:t>
-            </a:r>
-          </a:p>
-        </p:txBody>
-      </p:sp>
-      <p:sp>
-        <p:nvSpPr>
-          <p:cNvPr id="15" name="Rectangle 14"/>
-          <p:cNvSpPr/>
-          <p:nvPr/>
-        </p:nvSpPr>
-        <p:spPr>
-          <a:xfrm>
-            <a:off x="5394960" y="1463040"/>
-            <a:ext cx="768096" cy="768096"/>
-          </a:xfrm>
-          <a:prstGeom prst="rect">
-            <a:avLst/>
-          </a:prstGeom>
-          <a:solidFill>
-            <a:srgbClr val="F59E0B"/>
-          </a:solidFill>
-          <a:ln>
-            <a:noFill/>
-          </a:ln>
-          <a:effectLst/>
-        </p:spPr>
-        <p:style>
-          <a:lnRef idx="1">
-            <a:schemeClr val="accent1"/>
-          </a:lnRef>
-          <a:fillRef idx="3">
-            <a:schemeClr val="accent1"/>
-          </a:fillRef>
-          <a:effectRef idx="2">
-            <a:schemeClr val="accent1"/>
-          </a:effectRef>
-          <a:fontRef idx="minor">
-            <a:schemeClr val="lt1"/>
-          </a:fontRef>
-        </p:style>
-        <p:txBody>
-          <a:bodyPr rtlCol="0" anchor="ctr"/>
-          <a:lstStyle/>
-          <a:p>
-            <a:pPr algn="ctr"/>
-            <a:endParaRPr/>
-          </a:p>
-        </p:txBody>
-      </p:sp>
-      <p:sp>
-        <p:nvSpPr>
-          <p:cNvPr id="16" name="TextBox 15"/>
-          <p:cNvSpPr txBox="1"/>
-          <p:nvPr/>
-        </p:nvSpPr>
-        <p:spPr>
-          <a:xfrm>
-            <a:off x="5394960" y="1463040"/>
-            <a:ext cx="768096" cy="768096"/>
-          </a:xfrm>
-          <a:prstGeom prst="rect">
-            <a:avLst/>
-          </a:prstGeom>
-          <a:noFill/>
-        </p:spPr>
-        <p:txBody>
-          <a:bodyPr wrap="square" lIns="25400" tIns="12700" rIns="25400" bIns="12700" anchor="ctr">
-            <a:spAutoFit/>
-          </a:bodyPr>
-          <a:lstStyle/>
-          <a:p>
-            <a:pPr algn="ctr"/>
-            <a:r>
-              <a:rPr sz="1000" b="1" i="0">
-                <a:solidFill>
-                  <a:srgbClr val="FFFFFF"/>
-                </a:solidFill>
-                <a:latin typeface="맑은 고딕"/>
-              </a:rPr>
-              <a:t>분기 A</a:t>
-            </a:r>
-          </a:p>
-        </p:txBody>
-      </p:sp>
-      <p:sp>
-        <p:nvSpPr>
-          <p:cNvPr id="17" name="Rectangle 16"/>
-          <p:cNvSpPr/>
-          <p:nvPr/>
-        </p:nvSpPr>
-        <p:spPr>
-          <a:xfrm>
-            <a:off x="7178040" y="1463040"/>
-            <a:ext cx="768096" cy="768096"/>
-          </a:xfrm>
-          <a:prstGeom prst="rect">
-            <a:avLst/>
-          </a:prstGeom>
-          <a:solidFill>
-            <a:srgbClr val="F59E0B"/>
-          </a:solidFill>
-          <a:ln>
-            <a:noFill/>
-          </a:ln>
-          <a:effectLst/>
-        </p:spPr>
-        <p:style>
-          <a:lnRef idx="1">
-            <a:schemeClr val="accent1"/>
-          </a:lnRef>
-          <a:fillRef idx="3">
-            <a:schemeClr val="accent1"/>
-          </a:fillRef>
-          <a:effectRef idx="2">
-            <a:schemeClr val="accent1"/>
-          </a:effectRef>
-          <a:fontRef idx="minor">
-            <a:schemeClr val="lt1"/>
-          </a:fontRef>
-        </p:style>
-        <p:txBody>
-          <a:bodyPr rtlCol="0" anchor="ctr"/>
-          <a:lstStyle/>
-          <a:p>
-            <a:pPr algn="ctr"/>
-            <a:endParaRPr/>
-          </a:p>
-        </p:txBody>
-      </p:sp>
-      <p:sp>
-        <p:nvSpPr>
-          <p:cNvPr id="18" name="TextBox 17"/>
-          <p:cNvSpPr txBox="1"/>
-          <p:nvPr/>
-        </p:nvSpPr>
-        <p:spPr>
-          <a:xfrm>
-            <a:off x="7178040" y="1463040"/>
-            <a:ext cx="768096" cy="768096"/>
-          </a:xfrm>
-          <a:prstGeom prst="rect">
-            <a:avLst/>
-          </a:prstGeom>
-          <a:noFill/>
-        </p:spPr>
-        <p:txBody>
-          <a:bodyPr wrap="square" lIns="25400" tIns="12700" rIns="25400" bIns="12700" anchor="ctr">
-            <a:spAutoFit/>
-          </a:bodyPr>
-          <a:lstStyle/>
-          <a:p>
-            <a:pPr algn="ctr"/>
-            <a:r>
-              <a:rPr sz="1000" b="1" i="0">
-                <a:solidFill>
-                  <a:srgbClr val="FFFFFF"/>
-                </a:solidFill>
-                <a:latin typeface="맑은 고딕"/>
-              </a:rPr>
-              <a:t>분기 B</a:t>
-            </a:r>
-          </a:p>
-        </p:txBody>
-      </p:sp>
-      <p:sp>
-        <p:nvSpPr>
-          <p:cNvPr id="19" name="Rectangle 18"/>
-          <p:cNvSpPr/>
-          <p:nvPr/>
-        </p:nvSpPr>
-        <p:spPr>
-          <a:xfrm>
-            <a:off x="6400800" y="3566160"/>
-            <a:ext cx="548640" cy="548640"/>
-          </a:xfrm>
-          <a:prstGeom prst="rect">
-            <a:avLst/>
-          </a:prstGeom>
-          <a:solidFill>
-            <a:srgbClr val="DC2626"/>
-          </a:solidFill>
-          <a:ln>
-            <a:noFill/>
-          </a:ln>
-          <a:effectLst/>
-        </p:spPr>
-        <p:style>
-          <a:lnRef idx="1">
-            <a:schemeClr val="accent1"/>
-          </a:lnRef>
-          <a:fillRef idx="3">
-            <a:schemeClr val="accent1"/>
-          </a:fillRef>
-          <a:effectRef idx="2">
-            <a:schemeClr val="accent1"/>
-          </a:effectRef>
-          <a:fontRef idx="minor">
-            <a:schemeClr val="lt1"/>
-          </a:fontRef>
-        </p:style>
-        <p:txBody>
-          <a:bodyPr rtlCol="0" anchor="ctr"/>
-          <a:lstStyle/>
-          <a:p>
-            <a:pPr algn="ctr"/>
-            <a:endParaRPr/>
-          </a:p>
-        </p:txBody>
-      </p:sp>
-      <p:sp>
-        <p:nvSpPr>
-          <p:cNvPr id="20" name="TextBox 19"/>
-          <p:cNvSpPr txBox="1"/>
-          <p:nvPr/>
-        </p:nvSpPr>
-        <p:spPr>
-          <a:xfrm>
-            <a:off x="6400800" y="3566160"/>
-            <a:ext cx="548640" cy="548640"/>
-          </a:xfrm>
-          <a:prstGeom prst="rect">
-            <a:avLst/>
-          </a:prstGeom>
-          <a:noFill/>
-        </p:spPr>
-        <p:txBody>
-          <a:bodyPr wrap="square" lIns="25400" tIns="12700" rIns="25400" bIns="12700" anchor="ctr">
-            <a:spAutoFit/>
-          </a:bodyPr>
-          <a:lstStyle/>
-          <a:p>
-            <a:pPr algn="ctr"/>
-            <a:r>
-              <a:rPr sz="900" b="1" i="0">
-                <a:solidFill>
-                  <a:srgbClr val="FFFFFF"/>
-                </a:solidFill>
-                <a:latin typeface="맑은 고딕"/>
-              </a:rPr>
-              <a:t>SELL</a:t>
-            </a:r>
-          </a:p>
-        </p:txBody>
-      </p:sp>
-      <p:sp>
-        <p:nvSpPr>
-          <p:cNvPr id="21" name="TextBox 20"/>
-          <p:cNvSpPr txBox="1"/>
-          <p:nvPr/>
-        </p:nvSpPr>
-        <p:spPr>
-          <a:xfrm>
-            <a:off x="5120640" y="4297680"/>
-            <a:ext cx="3474720" cy="274320"/>
-          </a:xfrm>
-          <a:prstGeom prst="rect">
-            <a:avLst/>
-          </a:prstGeom>
-          <a:noFill/>
-        </p:spPr>
-        <p:txBody>
-          <a:bodyPr wrap="square" lIns="25400" tIns="12700" rIns="25400" bIns="12700" anchor="t">
-            <a:spAutoFit/>
-          </a:bodyPr>
-          <a:lstStyle/>
-          <a:p>
-            <a:pPr algn="ctr"/>
-            <a:r>
-              <a:rPr sz="850" b="0" i="0">
-                <a:solidFill>
-                  <a:srgbClr val="555555"/>
-                </a:solidFill>
-                <a:latin typeface="맑은 고딕"/>
-              </a:rPr>
-              <a:t>후보 1개 → 12시 · 2개 → 11/1시 · 3개+ 균등</a:t>
             </a:r>
           </a:p>
         </p:txBody>
@@ -6505,6 +6483,125 @@
           </a:p>
         </p:txBody>
       </p:sp>
+      <p:pic>
+        <p:nvPicPr>
+          <p:cNvPr id="24" name="그림 23"/>
+          <p:cNvPicPr>
+            <a:picLocks noChangeAspect="1"/>
+          </p:cNvPicPr>
+          <p:nvPr/>
+        </p:nvPicPr>
+        <p:blipFill rotWithShape="1">
+          <a:blip r:embed="rId2"/>
+          <a:srcRect r="44972"/>
+          <a:stretch/>
+        </p:blipFill>
+        <p:spPr>
+          <a:xfrm>
+            <a:off x="658271" y="1978390"/>
+            <a:ext cx="3386448" cy="1143160"/>
+          </a:xfrm>
+          <a:prstGeom prst="rect">
+            <a:avLst/>
+          </a:prstGeom>
+        </p:spPr>
+      </p:pic>
+      <p:pic>
+        <p:nvPicPr>
+          <p:cNvPr id="25" name="그림 24"/>
+          <p:cNvPicPr>
+            <a:picLocks noChangeAspect="1"/>
+          </p:cNvPicPr>
+          <p:nvPr/>
+        </p:nvPicPr>
+        <p:blipFill>
+          <a:blip r:embed="rId3"/>
+          <a:stretch>
+            <a:fillRect/>
+          </a:stretch>
+        </p:blipFill>
+        <p:spPr>
+          <a:xfrm>
+            <a:off x="4200167" y="1052465"/>
+            <a:ext cx="2286000" cy="2263310"/>
+          </a:xfrm>
+          <a:prstGeom prst="rect">
+            <a:avLst/>
+          </a:prstGeom>
+        </p:spPr>
+      </p:pic>
+      <p:pic>
+        <p:nvPicPr>
+          <p:cNvPr id="26" name="그림 25"/>
+          <p:cNvPicPr>
+            <a:picLocks noChangeAspect="1"/>
+          </p:cNvPicPr>
+          <p:nvPr/>
+        </p:nvPicPr>
+        <p:blipFill>
+          <a:blip r:embed="rId4"/>
+          <a:stretch>
+            <a:fillRect/>
+          </a:stretch>
+        </p:blipFill>
+        <p:spPr>
+          <a:xfrm>
+            <a:off x="6641615" y="1054242"/>
+            <a:ext cx="2050649" cy="2263310"/>
+          </a:xfrm>
+          <a:prstGeom prst="rect">
+            <a:avLst/>
+          </a:prstGeom>
+        </p:spPr>
+      </p:pic>
+      <p:pic>
+        <p:nvPicPr>
+          <p:cNvPr id="29" name="그림 28"/>
+          <p:cNvPicPr>
+            <a:picLocks noChangeAspect="1"/>
+          </p:cNvPicPr>
+          <p:nvPr/>
+        </p:nvPicPr>
+        <p:blipFill>
+          <a:blip r:embed="rId5"/>
+          <a:stretch>
+            <a:fillRect/>
+          </a:stretch>
+        </p:blipFill>
+        <p:spPr>
+          <a:xfrm>
+            <a:off x="6766561" y="3396576"/>
+            <a:ext cx="1215152" cy="1589552"/>
+          </a:xfrm>
+          <a:prstGeom prst="rect">
+            <a:avLst/>
+          </a:prstGeom>
+        </p:spPr>
+      </p:pic>
+      <p:pic>
+        <p:nvPicPr>
+          <p:cNvPr id="30" name="그림 29"/>
+          <p:cNvPicPr>
+            <a:picLocks noChangeAspect="1"/>
+          </p:cNvPicPr>
+          <p:nvPr/>
+        </p:nvPicPr>
+        <p:blipFill>
+          <a:blip r:embed="rId6"/>
+          <a:stretch>
+            <a:fillRect/>
+          </a:stretch>
+        </p:blipFill>
+        <p:spPr>
+          <a:xfrm>
+            <a:off x="5007567" y="3396576"/>
+            <a:ext cx="954988" cy="1589552"/>
+          </a:xfrm>
+          <a:prstGeom prst="rect">
+            <a:avLst/>
+          </a:prstGeom>
+        </p:spPr>
+      </p:pic>
     </p:spTree>
   </p:cSld>
   <p:clrMapOvr>
